--- a/figures/fig2/fig2.pptx
+++ b/figures/fig2/fig2.pptx
@@ -5,24 +5,25 @@
     <p:sldMasterId id="2147483648" r:id="rId1"/>
   </p:sldMasterIdLst>
   <p:notesMasterIdLst>
-    <p:notesMasterId r:id="rId3"/>
+    <p:notesMasterId r:id="rId4"/>
   </p:notesMasterIdLst>
   <p:sldIdLst>
     <p:sldId id="256" r:id="rId2"/>
+    <p:sldId id="257" r:id="rId3"/>
   </p:sldIdLst>
   <p:sldSz cx="36576000" cy="32918400"/>
   <p:notesSz cx="7010400" cy="9296400"/>
   <p:embeddedFontLst>
     <p:embeddedFont>
       <p:font typeface="Bookman Old Style" panose="02050604050505020204" pitchFamily="18" charset="0"/>
-      <p:regular r:id="rId4"/>
-      <p:bold r:id="rId5"/>
-      <p:italic r:id="rId6"/>
-      <p:boldItalic r:id="rId7"/>
+      <p:regular r:id="rId5"/>
+      <p:bold r:id="rId6"/>
+      <p:italic r:id="rId7"/>
+      <p:boldItalic r:id="rId8"/>
     </p:embeddedFont>
     <p:embeddedFont>
       <p:font typeface="Cambria Math" panose="02040503050406030204" pitchFamily="18" charset="0"/>
-      <p:regular r:id="rId8"/>
+      <p:regular r:id="rId9"/>
     </p:embeddedFont>
   </p:embeddedFontLst>
   <p:defaultTextStyle>
@@ -270,7 +271,7 @@
       </p15:sldGuideLst>
     </p:ext>
     <p:ext uri="http://customooxmlschemas.google.com/">
-      <go:slidesCustomData xmlns="" xmlns:mc="http://schemas.openxmlformats.org/markup-compatibility/2006" xmlns:mv="urn:schemas-microsoft-com:mac:vml" xmlns:c="http://schemas.openxmlformats.org/drawingml/2006/chart" xmlns:dgm="http://schemas.openxmlformats.org/drawingml/2006/diagram" xmlns:o="urn:schemas-microsoft-com:office:office" xmlns:v="urn:schemas-microsoft-com:vml" xmlns:pvml="urn:schemas-microsoft-com:office:powerpoint" xmlns:com="http://schemas.openxmlformats.org/drawingml/2006/compatibility" xmlns:p14="http://schemas.microsoft.com/office/powerpoint/2010/main" xmlns:p15="http://schemas.microsoft.com/office/powerpoint/2012/main" xmlns:ahyp="http://schemas.microsoft.com/office/drawing/2018/hyperlinkcolor" xmlns:go="http://customooxmlschemas.google.com/" r:id="rId10" roundtripDataSignature="AMtx7mhiytGPk8UOxiAGs9KaAxakDbg4SQ=="/>
+      <go:slidesCustomData xmlns:go="http://customooxmlschemas.google.com/" xmlns:ahyp="http://schemas.microsoft.com/office/drawing/2018/hyperlinkcolor" xmlns:p15="http://schemas.microsoft.com/office/powerpoint/2012/main" xmlns:p14="http://schemas.microsoft.com/office/powerpoint/2010/main" xmlns:com="http://schemas.openxmlformats.org/drawingml/2006/compatibility" xmlns:pvml="urn:schemas-microsoft-com:office:powerpoint" xmlns:v="urn:schemas-microsoft-com:vml" xmlns:o="urn:schemas-microsoft-com:office:office" xmlns:dgm="http://schemas.openxmlformats.org/drawingml/2006/diagram" xmlns:c="http://schemas.openxmlformats.org/drawingml/2006/chart" xmlns:mv="urn:schemas-microsoft-com:mac:vml" xmlns:mc="http://schemas.openxmlformats.org/markup-compatibility/2006" xmlns="" r:id="rId10" roundtripDataSignature="AMtx7mhiytGPk8UOxiAGs9KaAxakDbg4SQ=="/>
     </p:ext>
   </p:extLst>
 </p:presentation>
@@ -1642,6 +1643,215 @@
         </p:txBody>
       </p:sp>
     </p:spTree>
+  </p:cSld>
+  <p:clrMapOvr>
+    <a:masterClrMapping/>
+  </p:clrMapOvr>
+</p:notes>
+</file>
+
+<file path=ppt/notesSlides/notesSlide2.xml><?xml version="1.0" encoding="utf-8"?>
+<p:notes xmlns:a="http://schemas.openxmlformats.org/drawingml/2006/main" xmlns:r="http://schemas.openxmlformats.org/officeDocument/2006/relationships" xmlns:p="http://schemas.openxmlformats.org/presentationml/2006/main" showMasterSp="0" showMasterPhAnim="0">
+  <p:cSld>
+    <p:spTree>
+      <p:nvGrpSpPr>
+        <p:cNvPr id="1" name="Shape 84">
+          <a:extLst>
+            <a:ext uri="{FF2B5EF4-FFF2-40B4-BE49-F238E27FC236}">
+              <a16:creationId xmlns:a16="http://schemas.microsoft.com/office/drawing/2014/main" id="{B0A8F17E-F57E-68BC-4CBB-8F67830FF37B}"/>
+            </a:ext>
+          </a:extLst>
+        </p:cNvPr>
+        <p:cNvGrpSpPr/>
+        <p:nvPr/>
+      </p:nvGrpSpPr>
+      <p:grpSpPr>
+        <a:xfrm>
+          <a:off x="0" y="0"/>
+          <a:ext cx="0" cy="0"/>
+          <a:chOff x="0" y="0"/>
+          <a:chExt cx="0" cy="0"/>
+        </a:xfrm>
+      </p:grpSpPr>
+      <p:sp>
+        <p:nvSpPr>
+          <p:cNvPr id="85" name="Google Shape;85;p1:notes">
+            <a:extLst>
+              <a:ext uri="{FF2B5EF4-FFF2-40B4-BE49-F238E27FC236}">
+                <a16:creationId xmlns:a16="http://schemas.microsoft.com/office/drawing/2014/main" id="{DABE7498-29F9-A7EC-4C2F-12FB291ADCD7}"/>
+              </a:ext>
+            </a:extLst>
+          </p:cNvPr>
+          <p:cNvSpPr>
+            <a:spLocks noGrp="1" noRot="1" noChangeAspect="1"/>
+          </p:cNvSpPr>
+          <p:nvPr>
+            <p:ph type="sldImg" idx="2"/>
+          </p:nvPr>
+        </p:nvSpPr>
+        <p:spPr>
+          <a:xfrm>
+            <a:off x="1568450" y="696913"/>
+            <a:ext cx="3873500" cy="3486150"/>
+          </a:xfrm>
+          <a:custGeom>
+            <a:avLst/>
+            <a:gdLst/>
+            <a:ahLst/>
+            <a:cxnLst/>
+            <a:rect l="l" t="t" r="r" b="b"/>
+            <a:pathLst>
+              <a:path w="120000" h="120000" extrusionOk="0">
+                <a:moveTo>
+                  <a:pt x="0" y="0"/>
+                </a:moveTo>
+                <a:lnTo>
+                  <a:pt x="120000" y="0"/>
+                </a:lnTo>
+                <a:lnTo>
+                  <a:pt x="120000" y="120000"/>
+                </a:lnTo>
+                <a:lnTo>
+                  <a:pt x="0" y="120000"/>
+                </a:lnTo>
+                <a:close/>
+              </a:path>
+            </a:pathLst>
+          </a:custGeom>
+          <a:noFill/>
+          <a:ln w="9525" cap="flat" cmpd="sng">
+            <a:solidFill>
+              <a:srgbClr val="000000"/>
+            </a:solidFill>
+            <a:prstDash val="solid"/>
+            <a:miter lim="800000"/>
+            <a:headEnd type="none" w="sm" len="sm"/>
+            <a:tailEnd type="none" w="sm" len="sm"/>
+          </a:ln>
+        </p:spPr>
+      </p:sp>
+      <p:sp>
+        <p:nvSpPr>
+          <p:cNvPr id="86" name="Google Shape;86;p1:notes">
+            <a:extLst>
+              <a:ext uri="{FF2B5EF4-FFF2-40B4-BE49-F238E27FC236}">
+                <a16:creationId xmlns:a16="http://schemas.microsoft.com/office/drawing/2014/main" id="{85E59AE9-B993-82A0-1AC2-FF9A90D2EE68}"/>
+              </a:ext>
+            </a:extLst>
+          </p:cNvPr>
+          <p:cNvSpPr txBox="1">
+            <a:spLocks noGrp="1"/>
+          </p:cNvSpPr>
+          <p:nvPr>
+            <p:ph type="body" idx="1"/>
+          </p:nvPr>
+        </p:nvSpPr>
+        <p:spPr>
+          <a:xfrm>
+            <a:off x="701675" y="4416425"/>
+            <a:ext cx="5607050" cy="4183063"/>
+          </a:xfrm>
+          <a:prstGeom prst="rect">
+            <a:avLst/>
+          </a:prstGeom>
+          <a:noFill/>
+          <a:ln>
+            <a:noFill/>
+          </a:ln>
+        </p:spPr>
+        <p:txBody>
+          <a:bodyPr spcFirstLastPara="1" wrap="square" lIns="93150" tIns="46575" rIns="93150" bIns="46575" anchor="t" anchorCtr="0">
+            <a:noAutofit/>
+          </a:bodyPr>
+          <a:lstStyle/>
+          <a:p>
+            <a:pPr marL="0" lvl="0" indent="0" algn="l" rtl="0">
+              <a:spcBef>
+                <a:spcPts val="0"/>
+              </a:spcBef>
+              <a:spcAft>
+                <a:spcPts val="0"/>
+              </a:spcAft>
+              <a:buNone/>
+            </a:pPr>
+            <a:endParaRPr dirty="0"/>
+          </a:p>
+        </p:txBody>
+      </p:sp>
+      <p:sp>
+        <p:nvSpPr>
+          <p:cNvPr id="87" name="Google Shape;87;p1:notes">
+            <a:extLst>
+              <a:ext uri="{FF2B5EF4-FFF2-40B4-BE49-F238E27FC236}">
+                <a16:creationId xmlns:a16="http://schemas.microsoft.com/office/drawing/2014/main" id="{029DB069-606C-CDD5-E439-7B158CE0B39C}"/>
+              </a:ext>
+            </a:extLst>
+          </p:cNvPr>
+          <p:cNvSpPr txBox="1">
+            <a:spLocks noGrp="1"/>
+          </p:cNvSpPr>
+          <p:nvPr>
+            <p:ph type="sldNum" idx="12"/>
+          </p:nvPr>
+        </p:nvSpPr>
+        <p:spPr>
+          <a:xfrm>
+            <a:off x="3970338" y="8829675"/>
+            <a:ext cx="3038475" cy="465138"/>
+          </a:xfrm>
+          <a:prstGeom prst="rect">
+            <a:avLst/>
+          </a:prstGeom>
+          <a:noFill/>
+          <a:ln>
+            <a:noFill/>
+          </a:ln>
+        </p:spPr>
+        <p:txBody>
+          <a:bodyPr spcFirstLastPara="1" wrap="square" lIns="93150" tIns="46575" rIns="93150" bIns="46575" anchor="b" anchorCtr="0">
+            <a:noAutofit/>
+          </a:bodyPr>
+          <a:lstStyle/>
+          <a:p>
+            <a:pPr marL="0" marR="0" lvl="0" indent="0" algn="r" rtl="0">
+              <a:spcBef>
+                <a:spcPts val="0"/>
+              </a:spcBef>
+              <a:spcAft>
+                <a:spcPts val="0"/>
+              </a:spcAft>
+              <a:buNone/>
+            </a:pPr>
+            <a:fld id="{00000000-1234-1234-1234-123412341234}" type="slidenum">
+              <a:rPr lang="en-US" sz="1200" b="0" i="0" u="none" strike="noStrike" cap="none">
+                <a:solidFill>
+                  <a:schemeClr val="dk1"/>
+                </a:solidFill>
+                <a:latin typeface="Calibri"/>
+                <a:ea typeface="Calibri"/>
+                <a:cs typeface="Calibri"/>
+                <a:sym typeface="Calibri"/>
+              </a:rPr>
+              <a:t>2</a:t>
+            </a:fld>
+            <a:endParaRPr sz="1200" b="0" i="0" u="none" strike="noStrike" cap="none">
+              <a:solidFill>
+                <a:schemeClr val="dk1"/>
+              </a:solidFill>
+              <a:latin typeface="Calibri"/>
+              <a:ea typeface="Calibri"/>
+              <a:cs typeface="Calibri"/>
+              <a:sym typeface="Calibri"/>
+            </a:endParaRPr>
+          </a:p>
+        </p:txBody>
+      </p:sp>
+    </p:spTree>
+    <p:extLst>
+      <p:ext uri="{BB962C8B-B14F-4D97-AF65-F5344CB8AC3E}">
+        <p14:creationId xmlns:p14="http://schemas.microsoft.com/office/powerpoint/2010/main" val="428105597"/>
+      </p:ext>
+    </p:extLst>
   </p:cSld>
   <p:clrMapOvr>
     <a:masterClrMapping/>
@@ -11811,10 +12021,121 @@
       </p:grpSpPr>
       <p:pic>
         <p:nvPicPr>
+          <p:cNvPr id="4" name="Graphic 3">
+            <a:extLst>
+              <a:ext uri="{FF2B5EF4-FFF2-40B4-BE49-F238E27FC236}">
+                <a16:creationId xmlns:a16="http://schemas.microsoft.com/office/drawing/2014/main" id="{BC7CFDD5-831D-E3E7-68E8-FC42B13E661D}"/>
+              </a:ext>
+            </a:extLst>
+          </p:cNvPr>
+          <p:cNvPicPr>
+            <a:picLocks noChangeAspect="1"/>
+          </p:cNvPicPr>
+          <p:nvPr/>
+        </p:nvPicPr>
+        <p:blipFill>
+          <a:blip>
+            <a:extLst>
+              <a:ext uri="{96DAC541-7B7A-43D3-8B79-37D633B846F1}">
+                <asvg:svgBlip xmlns:asvg="http://schemas.microsoft.com/office/drawing/2016/SVG/main" r:embed="rId3"/>
+              </a:ext>
+            </a:extLst>
+          </a:blip>
+          <a:stretch>
+            <a:fillRect/>
+          </a:stretch>
+        </p:blipFill>
+        <p:spPr>
+          <a:xfrm>
+            <a:off x="0" y="1224650"/>
+            <a:ext cx="36576000" cy="30469100"/>
+          </a:xfrm>
+          <a:prstGeom prst="rect">
+            <a:avLst/>
+          </a:prstGeom>
+        </p:spPr>
+      </p:pic>
+      <p:pic>
+        <p:nvPicPr>
+          <p:cNvPr id="11" name="Graphic 10">
+            <a:extLst>
+              <a:ext uri="{FF2B5EF4-FFF2-40B4-BE49-F238E27FC236}">
+                <a16:creationId xmlns:a16="http://schemas.microsoft.com/office/drawing/2014/main" id="{27D42A4D-F7CF-65E2-FEA4-6632CC5ADEAE}"/>
+              </a:ext>
+            </a:extLst>
+          </p:cNvPr>
+          <p:cNvPicPr>
+            <a:picLocks noChangeAspect="1"/>
+          </p:cNvPicPr>
+          <p:nvPr/>
+        </p:nvPicPr>
+        <p:blipFill>
+          <a:blip>
+            <a:extLst>
+              <a:ext uri="{96DAC541-7B7A-43D3-8B79-37D633B846F1}">
+                <asvg:svgBlip xmlns:asvg="http://schemas.microsoft.com/office/drawing/2016/SVG/main" r:embed="rId3"/>
+              </a:ext>
+            </a:extLst>
+          </a:blip>
+          <a:stretch>
+            <a:fillRect/>
+          </a:stretch>
+        </p:blipFill>
+        <p:spPr>
+          <a:xfrm>
+            <a:off x="0" y="1224650"/>
+            <a:ext cx="36576000" cy="30469100"/>
+          </a:xfrm>
+          <a:prstGeom prst="rect">
+            <a:avLst/>
+          </a:prstGeom>
+        </p:spPr>
+      </p:pic>
+    </p:spTree>
+  </p:cSld>
+  <p:clrMapOvr>
+    <a:masterClrMapping/>
+  </p:clrMapOvr>
+</p:sld>
+</file>
+
+<file path=ppt/slides/slide2.xml><?xml version="1.0" encoding="utf-8"?>
+<p:sld xmlns:a="http://schemas.openxmlformats.org/drawingml/2006/main" xmlns:r="http://schemas.openxmlformats.org/officeDocument/2006/relationships" xmlns:p="http://schemas.openxmlformats.org/presentationml/2006/main">
+  <p:cSld>
+    <p:bg>
+      <p:bgPr>
+        <a:solidFill>
+          <a:schemeClr val="lt1"/>
+        </a:solidFill>
+        <a:effectLst/>
+      </p:bgPr>
+    </p:bg>
+    <p:spTree>
+      <p:nvGrpSpPr>
+        <p:cNvPr id="1" name="Shape 88">
+          <a:extLst>
+            <a:ext uri="{FF2B5EF4-FFF2-40B4-BE49-F238E27FC236}">
+              <a16:creationId xmlns:a16="http://schemas.microsoft.com/office/drawing/2014/main" id="{4DF7C944-6610-48CD-BAD0-FF2AE5DE4465}"/>
+            </a:ext>
+          </a:extLst>
+        </p:cNvPr>
+        <p:cNvGrpSpPr/>
+        <p:nvPr/>
+      </p:nvGrpSpPr>
+      <p:grpSpPr>
+        <a:xfrm>
+          <a:off x="0" y="0"/>
+          <a:ext cx="0" cy="0"/>
+          <a:chOff x="0" y="0"/>
+          <a:chExt cx="0" cy="0"/>
+        </a:xfrm>
+      </p:grpSpPr>
+      <p:pic>
+        <p:nvPicPr>
           <p:cNvPr id="3" name="Graphic 2">
             <a:extLst>
               <a:ext uri="{FF2B5EF4-FFF2-40B4-BE49-F238E27FC236}">
-                <a16:creationId xmlns:a16="http://schemas.microsoft.com/office/drawing/2014/main" id="{A6B54C21-A597-1F93-DA28-DD851FF3B7BF}"/>
+                <a16:creationId xmlns:a16="http://schemas.microsoft.com/office/drawing/2014/main" id="{7600F7F6-F07B-2D92-CFB6-B01BCCF0A816}"/>
               </a:ext>
             </a:extLst>
           </p:cNvPr>
@@ -11851,7 +12172,7 @@
           <p:cNvPr id="5" name="Graphic 4">
             <a:extLst>
               <a:ext uri="{FF2B5EF4-FFF2-40B4-BE49-F238E27FC236}">
-                <a16:creationId xmlns:a16="http://schemas.microsoft.com/office/drawing/2014/main" id="{D3946E7B-67AF-4CA4-B944-21E8965C0E7D}"/>
+                <a16:creationId xmlns:a16="http://schemas.microsoft.com/office/drawing/2014/main" id="{82D42F33-4E03-3495-F56B-36E23FBD1D41}"/>
               </a:ext>
             </a:extLst>
           </p:cNvPr>
@@ -11888,7 +12209,7 @@
           <p:cNvPr id="7" name="Graphic 6">
             <a:extLst>
               <a:ext uri="{FF2B5EF4-FFF2-40B4-BE49-F238E27FC236}">
-                <a16:creationId xmlns:a16="http://schemas.microsoft.com/office/drawing/2014/main" id="{9F07C57D-F5CE-2A3C-58C4-354555A86678}"/>
+                <a16:creationId xmlns:a16="http://schemas.microsoft.com/office/drawing/2014/main" id="{7110FD5C-EF9C-9251-C2EA-F7E2181D36CE}"/>
               </a:ext>
             </a:extLst>
           </p:cNvPr>
@@ -11925,7 +12246,7 @@
           <p:cNvPr id="8" name="TextBox 7">
             <a:extLst>
               <a:ext uri="{FF2B5EF4-FFF2-40B4-BE49-F238E27FC236}">
-                <a16:creationId xmlns:a16="http://schemas.microsoft.com/office/drawing/2014/main" id="{BC25AB9B-AEE9-187D-380C-29098A17A4AC}"/>
+                <a16:creationId xmlns:a16="http://schemas.microsoft.com/office/drawing/2014/main" id="{2E289EDD-EB50-87E9-C2F7-938841E495EB}"/>
               </a:ext>
             </a:extLst>
           </p:cNvPr>
@@ -11961,7 +12282,7 @@
           <p:cNvPr id="9" name="TextBox 8">
             <a:extLst>
               <a:ext uri="{FF2B5EF4-FFF2-40B4-BE49-F238E27FC236}">
-                <a16:creationId xmlns:a16="http://schemas.microsoft.com/office/drawing/2014/main" id="{E2B1EE65-EC9E-1F51-8681-5055DA25CE9E}"/>
+                <a16:creationId xmlns:a16="http://schemas.microsoft.com/office/drawing/2014/main" id="{0CF38412-D8C0-1CDF-1055-644F05968541}"/>
               </a:ext>
             </a:extLst>
           </p:cNvPr>
@@ -11997,7 +12318,7 @@
           <p:cNvPr id="10" name="TextBox 9">
             <a:extLst>
               <a:ext uri="{FF2B5EF4-FFF2-40B4-BE49-F238E27FC236}">
-                <a16:creationId xmlns:a16="http://schemas.microsoft.com/office/drawing/2014/main" id="{9FB6C664-1BD3-74C3-5CB2-4FB6E56B9A03}"/>
+                <a16:creationId xmlns:a16="http://schemas.microsoft.com/office/drawing/2014/main" id="{DAE78663-82BA-A583-151B-3706004DDA9F}"/>
               </a:ext>
             </a:extLst>
           </p:cNvPr>
@@ -12033,7 +12354,7 @@
           <p:cNvPr id="12" name="TextBox 11">
             <a:extLst>
               <a:ext uri="{FF2B5EF4-FFF2-40B4-BE49-F238E27FC236}">
-                <a16:creationId xmlns:a16="http://schemas.microsoft.com/office/drawing/2014/main" id="{F633E102-10EF-3EB6-91C1-031277A4852F}"/>
+                <a16:creationId xmlns:a16="http://schemas.microsoft.com/office/drawing/2014/main" id="{2BC06AEE-4D5C-2A10-C73E-6F1CA3E051FD}"/>
               </a:ext>
             </a:extLst>
           </p:cNvPr>
@@ -12069,7 +12390,7 @@
           <p:cNvPr id="13" name="TextBox 12">
             <a:extLst>
               <a:ext uri="{FF2B5EF4-FFF2-40B4-BE49-F238E27FC236}">
-                <a16:creationId xmlns:a16="http://schemas.microsoft.com/office/drawing/2014/main" id="{A4D1C6A7-B366-07F0-01A7-596723EE1617}"/>
+                <a16:creationId xmlns:a16="http://schemas.microsoft.com/office/drawing/2014/main" id="{371FD459-E15B-2B2C-5FA0-CB7D9035C752}"/>
               </a:ext>
             </a:extLst>
           </p:cNvPr>
@@ -12105,7 +12426,7 @@
           <p:cNvPr id="16" name="TextBox 15">
             <a:extLst>
               <a:ext uri="{FF2B5EF4-FFF2-40B4-BE49-F238E27FC236}">
-                <a16:creationId xmlns:a16="http://schemas.microsoft.com/office/drawing/2014/main" id="{DE7FEE44-9692-C1B7-C84E-31C3401B1E64}"/>
+                <a16:creationId xmlns:a16="http://schemas.microsoft.com/office/drawing/2014/main" id="{67683994-0E6A-2A44-ECC4-1C3F12D102CD}"/>
               </a:ext>
             </a:extLst>
           </p:cNvPr>
@@ -12141,7 +12462,7 @@
           <p:cNvPr id="17" name="TextBox 16">
             <a:extLst>
               <a:ext uri="{FF2B5EF4-FFF2-40B4-BE49-F238E27FC236}">
-                <a16:creationId xmlns:a16="http://schemas.microsoft.com/office/drawing/2014/main" id="{7EEED884-A9C5-289B-9542-0F2BB749BBDA}"/>
+                <a16:creationId xmlns:a16="http://schemas.microsoft.com/office/drawing/2014/main" id="{2D9BC77C-C51E-7F9B-EC01-2E58371FE8A4}"/>
               </a:ext>
             </a:extLst>
           </p:cNvPr>
@@ -12177,7 +12498,7 @@
           <p:cNvPr id="18" name="TextBox 17">
             <a:extLst>
               <a:ext uri="{FF2B5EF4-FFF2-40B4-BE49-F238E27FC236}">
-                <a16:creationId xmlns:a16="http://schemas.microsoft.com/office/drawing/2014/main" id="{B1160286-C2D6-B2D2-9C1E-BFC093A736C7}"/>
+                <a16:creationId xmlns:a16="http://schemas.microsoft.com/office/drawing/2014/main" id="{9C4EAB29-3909-0A67-9E10-1FFD992C7427}"/>
               </a:ext>
             </a:extLst>
           </p:cNvPr>
@@ -12213,7 +12534,7 @@
           <p:cNvPr id="19" name="TextBox 18">
             <a:extLst>
               <a:ext uri="{FF2B5EF4-FFF2-40B4-BE49-F238E27FC236}">
-                <a16:creationId xmlns:a16="http://schemas.microsoft.com/office/drawing/2014/main" id="{620B0A3C-055C-53A8-5CF9-6AC9F1B7E30D}"/>
+                <a16:creationId xmlns:a16="http://schemas.microsoft.com/office/drawing/2014/main" id="{C293E2B9-51C0-3A8D-57F1-82773F0BE6C6}"/>
               </a:ext>
             </a:extLst>
           </p:cNvPr>
@@ -12249,7 +12570,7 @@
           <p:cNvPr id="20" name="TextBox 19">
             <a:extLst>
               <a:ext uri="{FF2B5EF4-FFF2-40B4-BE49-F238E27FC236}">
-                <a16:creationId xmlns:a16="http://schemas.microsoft.com/office/drawing/2014/main" id="{5A6C3679-3BB0-DC23-6173-36F4AAF78602}"/>
+                <a16:creationId xmlns:a16="http://schemas.microsoft.com/office/drawing/2014/main" id="{39C42B2E-28AD-5C13-FDCD-9A2A57BAC558}"/>
               </a:ext>
             </a:extLst>
           </p:cNvPr>
@@ -12285,7 +12606,7 @@
           <p:cNvPr id="21" name="TextBox 20">
             <a:extLst>
               <a:ext uri="{FF2B5EF4-FFF2-40B4-BE49-F238E27FC236}">
-                <a16:creationId xmlns:a16="http://schemas.microsoft.com/office/drawing/2014/main" id="{E552C649-653C-6FE8-02C9-A44303C35B34}"/>
+                <a16:creationId xmlns:a16="http://schemas.microsoft.com/office/drawing/2014/main" id="{4456D6AA-29BD-3892-B4B6-FE1459DD0899}"/>
               </a:ext>
             </a:extLst>
           </p:cNvPr>
@@ -12321,7 +12642,7 @@
           <p:cNvPr id="22" name="TextBox 21">
             <a:extLst>
               <a:ext uri="{FF2B5EF4-FFF2-40B4-BE49-F238E27FC236}">
-                <a16:creationId xmlns:a16="http://schemas.microsoft.com/office/drawing/2014/main" id="{A42326F5-CEF2-5DF9-852D-587B962300F2}"/>
+                <a16:creationId xmlns:a16="http://schemas.microsoft.com/office/drawing/2014/main" id="{3C2B1AE8-1078-FC39-D5AD-59890634BF53}"/>
               </a:ext>
             </a:extLst>
           </p:cNvPr>
@@ -12357,7 +12678,7 @@
           <p:cNvPr id="23" name="TextBox 22">
             <a:extLst>
               <a:ext uri="{FF2B5EF4-FFF2-40B4-BE49-F238E27FC236}">
-                <a16:creationId xmlns:a16="http://schemas.microsoft.com/office/drawing/2014/main" id="{DCA0BE6A-8C31-4BE8-6B35-9EC81AA53B86}"/>
+                <a16:creationId xmlns:a16="http://schemas.microsoft.com/office/drawing/2014/main" id="{4FC8C04D-577D-8303-89C6-106FEFDBF8C8}"/>
               </a:ext>
             </a:extLst>
           </p:cNvPr>
@@ -12393,7 +12714,7 @@
           <p:cNvPr id="24" name="TextBox 23">
             <a:extLst>
               <a:ext uri="{FF2B5EF4-FFF2-40B4-BE49-F238E27FC236}">
-                <a16:creationId xmlns:a16="http://schemas.microsoft.com/office/drawing/2014/main" id="{82CAD3DA-87BF-AAE0-DE12-02523AD513D8}"/>
+                <a16:creationId xmlns:a16="http://schemas.microsoft.com/office/drawing/2014/main" id="{A93D3D04-CBEC-E2BA-3FB1-34BBEF6FBF6F}"/>
               </a:ext>
             </a:extLst>
           </p:cNvPr>
@@ -12429,7 +12750,7 @@
           <p:cNvPr id="28" name="TextBox 27">
             <a:extLst>
               <a:ext uri="{FF2B5EF4-FFF2-40B4-BE49-F238E27FC236}">
-                <a16:creationId xmlns:a16="http://schemas.microsoft.com/office/drawing/2014/main" id="{D6501544-7509-3D50-AE21-C96EEF14C384}"/>
+                <a16:creationId xmlns:a16="http://schemas.microsoft.com/office/drawing/2014/main" id="{5B065937-8518-4E48-98A5-CA1910DD9F80}"/>
               </a:ext>
             </a:extLst>
           </p:cNvPr>
@@ -12465,7 +12786,7 @@
           <p:cNvPr id="29" name="TextBox 28">
             <a:extLst>
               <a:ext uri="{FF2B5EF4-FFF2-40B4-BE49-F238E27FC236}">
-                <a16:creationId xmlns:a16="http://schemas.microsoft.com/office/drawing/2014/main" id="{FA88191E-395C-C92C-2DEB-A90678AB00D9}"/>
+                <a16:creationId xmlns:a16="http://schemas.microsoft.com/office/drawing/2014/main" id="{76D77102-F2D8-287C-988F-C35FFB8FBAB8}"/>
               </a:ext>
             </a:extLst>
           </p:cNvPr>
@@ -12501,7 +12822,7 @@
           <p:cNvPr id="30" name="TextBox 29">
             <a:extLst>
               <a:ext uri="{FF2B5EF4-FFF2-40B4-BE49-F238E27FC236}">
-                <a16:creationId xmlns:a16="http://schemas.microsoft.com/office/drawing/2014/main" id="{1AE7315D-B59C-DA2C-C7FA-C2159F394EBB}"/>
+                <a16:creationId xmlns:a16="http://schemas.microsoft.com/office/drawing/2014/main" id="{CFDD8E4F-24F1-FB7E-030A-02500C53900C}"/>
               </a:ext>
             </a:extLst>
           </p:cNvPr>
@@ -12544,7 +12865,7 @@
               <p:cNvPr id="31" name="TextBox 30">
                 <a:extLst>
                   <a:ext uri="{FF2B5EF4-FFF2-40B4-BE49-F238E27FC236}">
-                    <a16:creationId xmlns:a16="http://schemas.microsoft.com/office/drawing/2014/main" id="{441BEDCB-BD60-FC96-1D61-8E4A3C53F058}"/>
+                    <a16:creationId xmlns:a16="http://schemas.microsoft.com/office/drawing/2014/main" id="{DF3B66B7-6C4C-1237-01A8-A04FA84DB327}"/>
                   </a:ext>
                 </a:extLst>
               </p:cNvPr>
@@ -12605,7 +12926,7 @@
               <p:cNvPr id="31" name="TextBox 30">
                 <a:extLst>
                   <a:ext uri="{FF2B5EF4-FFF2-40B4-BE49-F238E27FC236}">
-                    <a16:creationId xmlns:a16="http://schemas.microsoft.com/office/drawing/2014/main" id="{441BEDCB-BD60-FC96-1D61-8E4A3C53F058}"/>
+                    <a16:creationId xmlns:a16="http://schemas.microsoft.com/office/drawing/2014/main" id="{DF3B66B7-6C4C-1237-01A8-A04FA84DB327}"/>
                   </a:ext>
                 </a:extLst>
               </p:cNvPr>
@@ -12651,7 +12972,7 @@
               <p:cNvPr id="32" name="TextBox 31">
                 <a:extLst>
                   <a:ext uri="{FF2B5EF4-FFF2-40B4-BE49-F238E27FC236}">
-                    <a16:creationId xmlns:a16="http://schemas.microsoft.com/office/drawing/2014/main" id="{2320B30E-C09A-D835-DCAC-CEF402921BBE}"/>
+                    <a16:creationId xmlns:a16="http://schemas.microsoft.com/office/drawing/2014/main" id="{46804A43-76BE-1DDD-7690-CB4808D2B7E3}"/>
                   </a:ext>
                 </a:extLst>
               </p:cNvPr>
@@ -12712,7 +13033,7 @@
               <p:cNvPr id="32" name="TextBox 31">
                 <a:extLst>
                   <a:ext uri="{FF2B5EF4-FFF2-40B4-BE49-F238E27FC236}">
-                    <a16:creationId xmlns:a16="http://schemas.microsoft.com/office/drawing/2014/main" id="{2320B30E-C09A-D835-DCAC-CEF402921BBE}"/>
+                    <a16:creationId xmlns:a16="http://schemas.microsoft.com/office/drawing/2014/main" id="{46804A43-76BE-1DDD-7690-CB4808D2B7E3}"/>
                   </a:ext>
                 </a:extLst>
               </p:cNvPr>
@@ -12758,7 +13079,7 @@
               <p:cNvPr id="33" name="TextBox 32">
                 <a:extLst>
                   <a:ext uri="{FF2B5EF4-FFF2-40B4-BE49-F238E27FC236}">
-                    <a16:creationId xmlns:a16="http://schemas.microsoft.com/office/drawing/2014/main" id="{4A98B2BE-CC9B-EBBC-9E9C-48C642AF6D6C}"/>
+                    <a16:creationId xmlns:a16="http://schemas.microsoft.com/office/drawing/2014/main" id="{7E8024D3-D366-5D7C-8F94-6661EA5A0359}"/>
                   </a:ext>
                 </a:extLst>
               </p:cNvPr>
@@ -12819,7 +13140,7 @@
               <p:cNvPr id="33" name="TextBox 32">
                 <a:extLst>
                   <a:ext uri="{FF2B5EF4-FFF2-40B4-BE49-F238E27FC236}">
-                    <a16:creationId xmlns:a16="http://schemas.microsoft.com/office/drawing/2014/main" id="{4A98B2BE-CC9B-EBBC-9E9C-48C642AF6D6C}"/>
+                    <a16:creationId xmlns:a16="http://schemas.microsoft.com/office/drawing/2014/main" id="{7E8024D3-D366-5D7C-8F94-6661EA5A0359}"/>
                   </a:ext>
                 </a:extLst>
               </p:cNvPr>
@@ -12863,7 +13184,7 @@
           <p:cNvPr id="34" name="Graphic 33">
             <a:extLst>
               <a:ext uri="{FF2B5EF4-FFF2-40B4-BE49-F238E27FC236}">
-                <a16:creationId xmlns:a16="http://schemas.microsoft.com/office/drawing/2014/main" id="{0A425F3F-3C89-D387-5D8E-55A597957C29}"/>
+                <a16:creationId xmlns:a16="http://schemas.microsoft.com/office/drawing/2014/main" id="{D745529D-8F4B-A265-F40E-FB4FB305CAD8}"/>
               </a:ext>
             </a:extLst>
           </p:cNvPr>
@@ -12899,7 +13220,7 @@
           <p:cNvPr id="35" name="Graphic 34">
             <a:extLst>
               <a:ext uri="{FF2B5EF4-FFF2-40B4-BE49-F238E27FC236}">
-                <a16:creationId xmlns:a16="http://schemas.microsoft.com/office/drawing/2014/main" id="{47D21C52-8847-43AA-D215-8237BB855BC9}"/>
+                <a16:creationId xmlns:a16="http://schemas.microsoft.com/office/drawing/2014/main" id="{9D2D61B5-D960-42EB-6B91-EBDDF524AED7}"/>
               </a:ext>
             </a:extLst>
           </p:cNvPr>
@@ -12935,7 +13256,7 @@
           <p:cNvPr id="36" name="Graphic 35">
             <a:extLst>
               <a:ext uri="{FF2B5EF4-FFF2-40B4-BE49-F238E27FC236}">
-                <a16:creationId xmlns:a16="http://schemas.microsoft.com/office/drawing/2014/main" id="{43612846-2D1E-2A17-9636-22DB9EB9CE75}"/>
+                <a16:creationId xmlns:a16="http://schemas.microsoft.com/office/drawing/2014/main" id="{9D345542-A74C-76FC-0811-F7670E94595D}"/>
               </a:ext>
             </a:extLst>
           </p:cNvPr>
@@ -12967,6 +13288,11 @@
         </p:spPr>
       </p:pic>
     </p:spTree>
+    <p:extLst>
+      <p:ext uri="{BB962C8B-B14F-4D97-AF65-F5344CB8AC3E}">
+        <p14:creationId xmlns:p14="http://schemas.microsoft.com/office/powerpoint/2010/main" val="3994108698"/>
+      </p:ext>
+    </p:extLst>
   </p:cSld>
   <p:clrMapOvr>
     <a:masterClrMapping/>

--- a/figures/fig2/fig2.pptx
+++ b/figures/fig2/fig2.pptx
@@ -13,19 +13,6 @@
   </p:sldIdLst>
   <p:sldSz cx="36576000" cy="32918400"/>
   <p:notesSz cx="7010400" cy="9296400"/>
-  <p:embeddedFontLst>
-    <p:embeddedFont>
-      <p:font typeface="Bookman Old Style" panose="02050604050505020204" pitchFamily="18" charset="0"/>
-      <p:regular r:id="rId5"/>
-      <p:bold r:id="rId6"/>
-      <p:italic r:id="rId7"/>
-      <p:boldItalic r:id="rId8"/>
-    </p:embeddedFont>
-    <p:embeddedFont>
-      <p:font typeface="Cambria Math" panose="02040503050406030204" pitchFamily="18" charset="0"/>
-      <p:regular r:id="rId9"/>
-    </p:embeddedFont>
-  </p:embeddedFontLst>
   <p:defaultTextStyle>
     <a:defPPr marR="0" lvl="0" algn="l" rtl="0">
       <a:lnSpc>
@@ -271,7 +258,7 @@
       </p15:sldGuideLst>
     </p:ext>
     <p:ext uri="http://customooxmlschemas.google.com/">
-      <go:slidesCustomData xmlns:go="http://customooxmlschemas.google.com/" xmlns:ahyp="http://schemas.microsoft.com/office/drawing/2018/hyperlinkcolor" xmlns:p15="http://schemas.microsoft.com/office/powerpoint/2012/main" xmlns:p14="http://schemas.microsoft.com/office/powerpoint/2010/main" xmlns:com="http://schemas.openxmlformats.org/drawingml/2006/compatibility" xmlns:pvml="urn:schemas-microsoft-com:office:powerpoint" xmlns:v="urn:schemas-microsoft-com:vml" xmlns:o="urn:schemas-microsoft-com:office:office" xmlns:dgm="http://schemas.openxmlformats.org/drawingml/2006/diagram" xmlns:c="http://schemas.openxmlformats.org/drawingml/2006/chart" xmlns:mv="urn:schemas-microsoft-com:mac:vml" xmlns:mc="http://schemas.openxmlformats.org/markup-compatibility/2006" xmlns="" r:id="rId10" roundtripDataSignature="AMtx7mhiytGPk8UOxiAGs9KaAxakDbg4SQ=="/>
+      <go:slidesCustomData xmlns="" xmlns:mc="http://schemas.openxmlformats.org/markup-compatibility/2006" xmlns:mv="urn:schemas-microsoft-com:mac:vml" xmlns:c="http://schemas.openxmlformats.org/drawingml/2006/chart" xmlns:dgm="http://schemas.openxmlformats.org/drawingml/2006/diagram" xmlns:o="urn:schemas-microsoft-com:office:office" xmlns:v="urn:schemas-microsoft-com:vml" xmlns:pvml="urn:schemas-microsoft-com:office:powerpoint" xmlns:com="http://schemas.openxmlformats.org/drawingml/2006/compatibility" xmlns:p14="http://schemas.microsoft.com/office/powerpoint/2010/main" xmlns:p15="http://schemas.microsoft.com/office/powerpoint/2012/main" xmlns:ahyp="http://schemas.microsoft.com/office/drawing/2018/hyperlinkcolor" xmlns:go="http://customooxmlschemas.google.com/" r:id="rId10" roundtripDataSignature="AMtx7mhiytGPk8UOxiAGs9KaAxakDbg4SQ=="/>
     </p:ext>
   </p:extLst>
 </p:presentation>
@@ -12021,10 +12008,10 @@
       </p:grpSpPr>
       <p:pic>
         <p:nvPicPr>
-          <p:cNvPr id="4" name="Graphic 3">
+          <p:cNvPr id="3" name="Graphic 2">
             <a:extLst>
               <a:ext uri="{FF2B5EF4-FFF2-40B4-BE49-F238E27FC236}">
-                <a16:creationId xmlns:a16="http://schemas.microsoft.com/office/drawing/2014/main" id="{BC7CFDD5-831D-E3E7-68E8-FC42B13E661D}"/>
+                <a16:creationId xmlns:a16="http://schemas.microsoft.com/office/drawing/2014/main" id="{92A07F75-F53D-1471-29BC-C9D471D48F6D}"/>
               </a:ext>
             </a:extLst>
           </p:cNvPr>
@@ -12041,50 +12028,15 @@
               </a:ext>
             </a:extLst>
           </a:blip>
+          <a:srcRect l="2187" r="2084"/>
           <a:stretch>
             <a:fillRect/>
           </a:stretch>
         </p:blipFill>
         <p:spPr>
           <a:xfrm>
-            <a:off x="0" y="1224650"/>
-            <a:ext cx="36576000" cy="30469100"/>
-          </a:xfrm>
-          <a:prstGeom prst="rect">
-            <a:avLst/>
-          </a:prstGeom>
-        </p:spPr>
-      </p:pic>
-      <p:pic>
-        <p:nvPicPr>
-          <p:cNvPr id="11" name="Graphic 10">
-            <a:extLst>
-              <a:ext uri="{FF2B5EF4-FFF2-40B4-BE49-F238E27FC236}">
-                <a16:creationId xmlns:a16="http://schemas.microsoft.com/office/drawing/2014/main" id="{27D42A4D-F7CF-65E2-FEA4-6632CC5ADEAE}"/>
-              </a:ext>
-            </a:extLst>
-          </p:cNvPr>
-          <p:cNvPicPr>
-            <a:picLocks noChangeAspect="1"/>
-          </p:cNvPicPr>
-          <p:nvPr/>
-        </p:nvPicPr>
-        <p:blipFill>
-          <a:blip>
-            <a:extLst>
-              <a:ext uri="{96DAC541-7B7A-43D3-8B79-37D633B846F1}">
-                <asvg:svgBlip xmlns:asvg="http://schemas.microsoft.com/office/drawing/2016/SVG/main" r:embed="rId3"/>
-              </a:ext>
-            </a:extLst>
-          </a:blip>
-          <a:stretch>
-            <a:fillRect/>
-          </a:stretch>
-        </p:blipFill>
-        <p:spPr>
-          <a:xfrm>
-            <a:off x="0" y="1224650"/>
-            <a:ext cx="36576000" cy="30469100"/>
+            <a:off x="800100" y="1224650"/>
+            <a:ext cx="35013900" cy="30469100"/>
           </a:xfrm>
           <a:prstGeom prst="rect">
             <a:avLst/>
@@ -12271,7 +12223,9 @@
           <a:p>
             <a:pPr algn="r"/>
             <a:r>
-              <a:rPr lang="en-US" sz="1800" dirty="0"/>
+              <a:rPr lang="en-US" sz="1800" dirty="0">
+                <a:latin typeface="+mn-lt"/>
+              </a:rPr>
               <a:t>1.0</a:t>
             </a:r>
           </a:p>
@@ -12307,7 +12261,9 @@
           <a:p>
             <a:pPr algn="r"/>
             <a:r>
-              <a:rPr lang="en-US" sz="1800" dirty="0"/>
+              <a:rPr lang="en-US" sz="1800" dirty="0">
+                <a:latin typeface="+mn-lt"/>
+              </a:rPr>
               <a:t>0.8</a:t>
             </a:r>
           </a:p>
@@ -12343,7 +12299,9 @@
           <a:p>
             <a:pPr algn="r"/>
             <a:r>
-              <a:rPr lang="en-US" sz="1800" dirty="0"/>
+              <a:rPr lang="en-US" sz="1800" dirty="0">
+                <a:latin typeface="+mn-lt"/>
+              </a:rPr>
               <a:t>0.6</a:t>
             </a:r>
           </a:p>
@@ -12379,7 +12337,9 @@
           <a:p>
             <a:pPr algn="r"/>
             <a:r>
-              <a:rPr lang="en-US" sz="1800" dirty="0"/>
+              <a:rPr lang="en-US" sz="1800" dirty="0">
+                <a:latin typeface="+mn-lt"/>
+              </a:rPr>
               <a:t>0.4</a:t>
             </a:r>
           </a:p>
@@ -12415,7 +12375,9 @@
           <a:p>
             <a:pPr algn="r"/>
             <a:r>
-              <a:rPr lang="en-US" sz="1800" dirty="0"/>
+              <a:rPr lang="en-US" sz="1800" dirty="0">
+                <a:latin typeface="+mn-lt"/>
+              </a:rPr>
               <a:t>0.2</a:t>
             </a:r>
           </a:p>
@@ -12451,7 +12413,9 @@
           <a:p>
             <a:pPr algn="r"/>
             <a:r>
-              <a:rPr lang="en-US" sz="1800" dirty="0"/>
+              <a:rPr lang="en-US" sz="1800" dirty="0">
+                <a:latin typeface="+mn-lt"/>
+              </a:rPr>
               <a:t>-0.05</a:t>
             </a:r>
           </a:p>
@@ -12487,7 +12451,9 @@
           <a:p>
             <a:pPr algn="r"/>
             <a:r>
-              <a:rPr lang="en-US" sz="1800" dirty="0"/>
+              <a:rPr lang="en-US" sz="1800" dirty="0">
+                <a:latin typeface="+mn-lt"/>
+              </a:rPr>
               <a:t>-0.1</a:t>
             </a:r>
           </a:p>
@@ -12523,7 +12489,9 @@
           <a:p>
             <a:pPr algn="r"/>
             <a:r>
-              <a:rPr lang="en-US" sz="1800" dirty="0"/>
+              <a:rPr lang="en-US" sz="1800" dirty="0">
+                <a:latin typeface="+mn-lt"/>
+              </a:rPr>
               <a:t>-0.15</a:t>
             </a:r>
           </a:p>
@@ -12559,7 +12527,9 @@
           <a:p>
             <a:pPr algn="r"/>
             <a:r>
-              <a:rPr lang="en-US" sz="1800" dirty="0"/>
+              <a:rPr lang="en-US" sz="1800" dirty="0">
+                <a:latin typeface="+mn-lt"/>
+              </a:rPr>
               <a:t>-0.2</a:t>
             </a:r>
           </a:p>
@@ -12595,7 +12565,9 @@
           <a:p>
             <a:pPr algn="r"/>
             <a:r>
-              <a:rPr lang="en-US" sz="1800" dirty="0"/>
+              <a:rPr lang="en-US" sz="1800" dirty="0">
+                <a:latin typeface="+mn-lt"/>
+              </a:rPr>
               <a:t>-0.25</a:t>
             </a:r>
           </a:p>
@@ -12631,7 +12603,9 @@
           <a:p>
             <a:pPr algn="r"/>
             <a:r>
-              <a:rPr lang="en-US" sz="1800" dirty="0"/>
+              <a:rPr lang="en-US" sz="1800" dirty="0">
+                <a:latin typeface="+mn-lt"/>
+              </a:rPr>
               <a:t>-0.1</a:t>
             </a:r>
           </a:p>
@@ -12667,7 +12641,9 @@
           <a:p>
             <a:pPr algn="r"/>
             <a:r>
-              <a:rPr lang="en-US" sz="1800" dirty="0"/>
+              <a:rPr lang="en-US" sz="1800" dirty="0">
+                <a:latin typeface="+mn-lt"/>
+              </a:rPr>
               <a:t>-0.3</a:t>
             </a:r>
           </a:p>
@@ -12703,7 +12679,9 @@
           <a:p>
             <a:pPr algn="r"/>
             <a:r>
-              <a:rPr lang="en-US" sz="1800" dirty="0"/>
+              <a:rPr lang="en-US" sz="1800" dirty="0">
+                <a:latin typeface="+mn-lt"/>
+              </a:rPr>
               <a:t>-0.5</a:t>
             </a:r>
           </a:p>
@@ -12739,7 +12717,9 @@
           <a:p>
             <a:pPr algn="r"/>
             <a:r>
-              <a:rPr lang="en-US" sz="1800" dirty="0"/>
+              <a:rPr lang="en-US" sz="1800" dirty="0">
+                <a:latin typeface="+mn-lt"/>
+              </a:rPr>
               <a:t>-0.7</a:t>
             </a:r>
           </a:p>
@@ -12775,7 +12755,9 @@
           <a:p>
             <a:pPr algn="r"/>
             <a:r>
-              <a:rPr lang="en-US" sz="2200" dirty="0"/>
+              <a:rPr lang="en-US" sz="2200" dirty="0">
+                <a:latin typeface="+mn-lt"/>
+              </a:rPr>
               <a:t>-(CV)</a:t>
             </a:r>
           </a:p>
@@ -12811,7 +12793,9 @@
           <a:p>
             <a:pPr algn="r"/>
             <a:r>
-              <a:rPr lang="en-US" sz="2200" dirty="0"/>
+              <a:rPr lang="en-US" sz="2200" dirty="0">
+                <a:latin typeface="+mn-lt"/>
+              </a:rPr>
               <a:t>-(Gini)</a:t>
             </a:r>
           </a:p>
@@ -12847,14 +12831,20 @@
           <a:p>
             <a:pPr algn="r"/>
             <a:r>
-              <a:rPr lang="en-US" sz="2200" dirty="0"/>
+              <a:rPr lang="en-US" sz="2200" dirty="0">
+                <a:latin typeface="+mn-lt"/>
+              </a:rPr>
               <a:t>R</a:t>
             </a:r>
             <a:r>
-              <a:rPr lang="en-US" sz="2200" baseline="30000" dirty="0"/>
+              <a:rPr lang="en-US" sz="2200" baseline="30000" dirty="0">
+                <a:latin typeface="+mn-lt"/>
+              </a:rPr>
               <a:t>2</a:t>
             </a:r>
-            <a:endParaRPr lang="en-US" sz="2200" dirty="0"/>
+            <a:endParaRPr lang="en-US" sz="2200" dirty="0">
+              <a:latin typeface="+mn-lt"/>
+            </a:endParaRPr>
           </a:p>
         </p:txBody>
       </p:sp>
@@ -12897,24 +12887,33 @@
                     <m:oMath xmlns:m="http://schemas.openxmlformats.org/officeDocument/2006/math">
                       <m:r>
                         <m:rPr>
-                          <m:sty m:val="p"/>
+                          <m:nor/>
                         </m:rPr>
                         <a:rPr lang="en-US" sz="2400" b="0" i="0" smtClean="0">
-                          <a:latin typeface="Cambria Math" panose="02040503050406030204" pitchFamily="18" charset="0"/>
+                          <a:latin typeface="+mn-lt"/>
                         </a:rPr>
                         <m:t>N</m:t>
                       </m:r>
                       <m:r>
                         <a:rPr lang="en-US" sz="2400" b="0" i="0" smtClean="0">
-                          <a:latin typeface="Cambria Math" panose="02040503050406030204" pitchFamily="18" charset="0"/>
+                          <a:latin typeface="+mn-lt"/>
                         </a:rPr>
-                        <m:t>=50</m:t>
+                        <m:t>=</m:t>
+                      </m:r>
+                      <m:r>
+                        <m:rPr>
+                          <m:nor/>
+                        </m:rPr>
+                        <a:rPr lang="en-US" sz="2400" b="0" i="0" smtClean="0">
+                          <a:latin typeface="+mn-lt"/>
+                        </a:rPr>
+                        <m:t>50</m:t>
                       </m:r>
                     </m:oMath>
                   </m:oMathPara>
                 </a14:m>
                 <a:endParaRPr lang="en-US" sz="2400" dirty="0">
-                  <a:latin typeface="Bookman Old Style" panose="02050604050505020204" pitchFamily="18" charset="0"/>
+                  <a:latin typeface="+mn-lt"/>
                 </a:endParaRPr>
               </a:p>
             </p:txBody>
@@ -13004,24 +13003,33 @@
                     <m:oMath xmlns:m="http://schemas.openxmlformats.org/officeDocument/2006/math">
                       <m:r>
                         <m:rPr>
-                          <m:sty m:val="p"/>
+                          <m:nor/>
                         </m:rPr>
                         <a:rPr lang="en-US" sz="2400" b="0" i="0" smtClean="0">
-                          <a:latin typeface="Cambria Math" panose="02040503050406030204" pitchFamily="18" charset="0"/>
+                          <a:latin typeface="+mn-lt"/>
                         </a:rPr>
                         <m:t>N</m:t>
                       </m:r>
                       <m:r>
                         <a:rPr lang="en-US" sz="2400" b="0" i="0" smtClean="0">
-                          <a:latin typeface="Cambria Math" panose="02040503050406030204" pitchFamily="18" charset="0"/>
+                          <a:latin typeface="+mn-lt"/>
                         </a:rPr>
-                        <m:t>=45</m:t>
+                        <m:t>=</m:t>
+                      </m:r>
+                      <m:r>
+                        <m:rPr>
+                          <m:nor/>
+                        </m:rPr>
+                        <a:rPr lang="en-US" sz="2400" b="0" i="0" smtClean="0">
+                          <a:latin typeface="+mn-lt"/>
+                        </a:rPr>
+                        <m:t>45</m:t>
                       </m:r>
                     </m:oMath>
                   </m:oMathPara>
                 </a14:m>
                 <a:endParaRPr lang="en-US" sz="2400" dirty="0">
-                  <a:latin typeface="Bookman Old Style" panose="02050604050505020204" pitchFamily="18" charset="0"/>
+                  <a:latin typeface="+mn-lt"/>
                 </a:endParaRPr>
               </a:p>
             </p:txBody>
@@ -13111,24 +13119,33 @@
                     <m:oMath xmlns:m="http://schemas.openxmlformats.org/officeDocument/2006/math">
                       <m:r>
                         <m:rPr>
-                          <m:sty m:val="p"/>
+                          <m:nor/>
                         </m:rPr>
                         <a:rPr lang="en-US" sz="2400" b="0" i="0" smtClean="0">
-                          <a:latin typeface="Cambria Math" panose="02040503050406030204" pitchFamily="18" charset="0"/>
+                          <a:latin typeface="+mn-lt"/>
                         </a:rPr>
                         <m:t>N</m:t>
                       </m:r>
                       <m:r>
                         <a:rPr lang="en-US" sz="2400" b="0" i="0" smtClean="0">
-                          <a:latin typeface="Cambria Math" panose="02040503050406030204" pitchFamily="18" charset="0"/>
+                          <a:latin typeface="+mn-lt"/>
                         </a:rPr>
-                        <m:t>=22</m:t>
+                        <m:t>=</m:t>
+                      </m:r>
+                      <m:r>
+                        <m:rPr>
+                          <m:nor/>
+                        </m:rPr>
+                        <a:rPr lang="en-US" sz="2400" b="0" i="0" smtClean="0">
+                          <a:latin typeface="+mn-lt"/>
+                        </a:rPr>
+                        <m:t>22</m:t>
                       </m:r>
                     </m:oMath>
                   </m:oMathPara>
                 </a14:m>
                 <a:endParaRPr lang="en-US" sz="2400" dirty="0">
-                  <a:latin typeface="Bookman Old Style" panose="02050604050505020204" pitchFamily="18" charset="0"/>
+                  <a:latin typeface="+mn-lt"/>
                 </a:endParaRPr>
               </a:p>
             </p:txBody>
